--- a/builder/assets/reference-pages/waterfall-attribution.pptx
+++ b/builder/assets/reference-pages/waterfall-attribution.pptx
@@ -1097,7 +1097,7 @@
                   <a:srgbClr val="172033"/>
                 </a:solidFill>
               </a:rPr>
-              <a:t>利润减少二十亿元，主要由人工和价格因素造成</a:t>
+              <a:t>Profit decreased by RMB 2 billion, mainly caused by labor and price factors</a:t>
             </a:r>
           </a:p>
         </p:txBody>
@@ -1335,7 +1335,7 @@
                   <a:srgbClr val="15375F"/>
                 </a:solidFill>
               </a:rPr>
-              <a:t>100亿元</a:t>
+              <a:t>100billion</a:t>
             </a:r>
           </a:p>
         </p:txBody>
@@ -1385,7 +1385,7 @@
                   <a:srgbClr val="172033"/>
                 </a:solidFill>
               </a:rPr>
-              <a:t>基准期利润</a:t>
+              <a:t>Base period profit</a:t>
             </a:r>
           </a:p>
         </p:txBody>
@@ -1468,7 +1468,7 @@
                   <a:srgbClr val="E8872D"/>
                 </a:solidFill>
               </a:rPr>
-              <a:t>-10亿元</a:t>
+              <a:t>-10billion</a:t>
             </a:r>
           </a:p>
         </p:txBody>
@@ -1518,7 +1518,7 @@
                   <a:srgbClr val="172033"/>
                 </a:solidFill>
               </a:rPr>
-              <a:t>价格因素</a:t>
+              <a:t>price factor</a:t>
             </a:r>
           </a:p>
         </p:txBody>
@@ -1601,7 +1601,7 @@
                   <a:srgbClr val="2F6FB2"/>
                 </a:solidFill>
               </a:rPr>
-              <a:t>+5亿元</a:t>
+              <a:t>+5billion</a:t>
             </a:r>
           </a:p>
         </p:txBody>
@@ -1651,7 +1651,7 @@
                   <a:srgbClr val="172033"/>
                 </a:solidFill>
               </a:rPr>
-              <a:t>销量因素</a:t>
+              <a:t>sales factor</a:t>
             </a:r>
           </a:p>
         </p:txBody>
@@ -1734,7 +1734,7 @@
                   <a:srgbClr val="E8872D"/>
                 </a:solidFill>
               </a:rPr>
-              <a:t>-15亿元</a:t>
+              <a:t>-15billion</a:t>
             </a:r>
           </a:p>
         </p:txBody>
@@ -1784,7 +1784,7 @@
                   <a:srgbClr val="172033"/>
                 </a:solidFill>
               </a:rPr>
-              <a:t>人工成本</a:t>
+              <a:t>Labor cost</a:t>
             </a:r>
           </a:p>
         </p:txBody>
@@ -1867,7 +1867,7 @@
                   <a:srgbClr val="15375F"/>
                 </a:solidFill>
               </a:rPr>
-              <a:t>80亿元</a:t>
+              <a:t>80billion</a:t>
             </a:r>
           </a:p>
         </p:txBody>
@@ -1917,7 +1917,7 @@
                   <a:srgbClr val="172033"/>
                 </a:solidFill>
               </a:rPr>
-              <a:t>当期利润</a:t>
+              <a:t>Profit for the current period</a:t>
             </a:r>
           </a:p>
         </p:txBody>
@@ -2002,7 +2002,7 @@
                   <a:srgbClr val="2F6FB2"/>
                 </a:solidFill>
               </a:rPr>
-              <a:t>关键洞察</a:t>
+              <a:t>key insights</a:t>
             </a:r>
           </a:p>
         </p:txBody>
@@ -2052,7 +2052,7 @@
                   <a:srgbClr val="172033"/>
                 </a:solidFill>
               </a:rPr>
-              <a:t>人工成本是最大的可控负向因素</a:t>
+              <a:t>Labor cost is the largest controllable negative factor</a:t>
             </a:r>
           </a:p>
         </p:txBody>
@@ -2106,7 +2106,7 @@
                   <a:srgbClr val="172033"/>
                 </a:solidFill>
               </a:rPr>
-              <a:t>优先回收人工成本和价格损失</a:t>
+              <a:t>Prioritize recovery of labor costs and price losses</a:t>
             </a:r>
           </a:p>
         </p:txBody>
